--- a/apps/resources/bundled_files/6-klass-turmushtuk-eseptoo-oyun-atyshuu.pptx
+++ b/apps/resources/bundled_files/6-klass-turmushtuk-eseptoo-oyun-atyshuu.pptx
@@ -3797,7 +3797,7 @@
                 </a:solidFill>
                 <a:latin typeface="PT Sans"/>
               </a:rPr>
-              <a:t>6-класс ›</a:t>
+              <a:t/>
             </a:r>
           </a:p>
           <a:p>
@@ -4705,7 +4705,7 @@
                 </a:solidFill>
                 <a:latin typeface="PT Sans"/>
               </a:rPr>
-              <a:t>6-класс ›</a:t>
+              <a:t/>
             </a:r>
           </a:p>
           <a:p>
@@ -5165,7 +5165,7 @@
                 </a:solidFill>
                 <a:latin typeface="PT Sans"/>
               </a:rPr>
-              <a:t>6-класс ›</a:t>
+              <a:t/>
             </a:r>
           </a:p>
           <a:p>
@@ -5643,7 +5643,7 @@
                 </a:solidFill>
                 <a:latin typeface="PT Sans"/>
               </a:rPr>
-              <a:t>6-класс ›</a:t>
+              <a:t/>
             </a:r>
           </a:p>
           <a:p>
@@ -6103,7 +6103,7 @@
                 </a:solidFill>
                 <a:latin typeface="PT Sans"/>
               </a:rPr>
-              <a:t>6-класс ›</a:t>
+              <a:t/>
             </a:r>
           </a:p>
           <a:p>
@@ -6581,7 +6581,7 @@
                 </a:solidFill>
                 <a:latin typeface="PT Sans"/>
               </a:rPr>
-              <a:t>6-класс ›</a:t>
+              <a:t/>
             </a:r>
           </a:p>
           <a:p>
@@ -7041,7 +7041,7 @@
                 </a:solidFill>
                 <a:latin typeface="PT Sans"/>
               </a:rPr>
-              <a:t>6-класс ›</a:t>
+              <a:t/>
             </a:r>
           </a:p>
           <a:p>
@@ -7519,7 +7519,7 @@
                 </a:solidFill>
                 <a:latin typeface="PT Sans"/>
               </a:rPr>
-              <a:t>6-класс ›</a:t>
+              <a:t/>
             </a:r>
           </a:p>
           <a:p>
@@ -7979,7 +7979,7 @@
                 </a:solidFill>
                 <a:latin typeface="PT Sans"/>
               </a:rPr>
-              <a:t>6-класс ›</a:t>
+              <a:t/>
             </a:r>
           </a:p>
           <a:p>
@@ -8457,7 +8457,7 @@
                 </a:solidFill>
                 <a:latin typeface="PT Sans"/>
               </a:rPr>
-              <a:t>6-класс ›</a:t>
+              <a:t/>
             </a:r>
           </a:p>
           <a:p>
@@ -8917,7 +8917,7 @@
                 </a:solidFill>
                 <a:latin typeface="PT Sans"/>
               </a:rPr>
-              <a:t>6-класс ›</a:t>
+              <a:t/>
             </a:r>
           </a:p>
           <a:p>
@@ -9395,7 +9395,7 @@
                 </a:solidFill>
                 <a:latin typeface="PT Sans"/>
               </a:rPr>
-              <a:t>6-класс ›</a:t>
+              <a:t/>
             </a:r>
           </a:p>
           <a:p>
@@ -9855,7 +9855,7 @@
                 </a:solidFill>
                 <a:latin typeface="PT Sans"/>
               </a:rPr>
-              <a:t>6-класс ›</a:t>
+              <a:t/>
             </a:r>
           </a:p>
           <a:p>
@@ -10315,7 +10315,7 @@
                 </a:solidFill>
                 <a:latin typeface="PT Sans"/>
               </a:rPr>
-              <a:t>6-класс ›</a:t>
+              <a:t/>
             </a:r>
           </a:p>
           <a:p>
@@ -10793,7 +10793,7 @@
                 </a:solidFill>
                 <a:latin typeface="PT Sans"/>
               </a:rPr>
-              <a:t>6-класс ›</a:t>
+              <a:t/>
             </a:r>
           </a:p>
           <a:p>
@@ -11253,7 +11253,7 @@
                 </a:solidFill>
                 <a:latin typeface="PT Sans"/>
               </a:rPr>
-              <a:t>6-класс ›</a:t>
+              <a:t/>
             </a:r>
           </a:p>
           <a:p>
@@ -11731,7 +11731,7 @@
                 </a:solidFill>
                 <a:latin typeface="PT Sans"/>
               </a:rPr>
-              <a:t>6-класс ›</a:t>
+              <a:t/>
             </a:r>
           </a:p>
           <a:p>
@@ -12191,7 +12191,7 @@
                 </a:solidFill>
                 <a:latin typeface="PT Sans"/>
               </a:rPr>
-              <a:t>6-класс ›</a:t>
+              <a:t/>
             </a:r>
           </a:p>
           <a:p>
@@ -12669,7 +12669,7 @@
                 </a:solidFill>
                 <a:latin typeface="PT Sans"/>
               </a:rPr>
-              <a:t>6-класс ›</a:t>
+              <a:t/>
             </a:r>
           </a:p>
           <a:p>
@@ -13147,7 +13147,7 @@
                 </a:solidFill>
                 <a:latin typeface="PT Sans"/>
               </a:rPr>
-              <a:t>6-класс ›</a:t>
+              <a:t/>
             </a:r>
           </a:p>
           <a:p>
@@ -13607,7 +13607,7 @@
                 </a:solidFill>
                 <a:latin typeface="PT Sans"/>
               </a:rPr>
-              <a:t>6-класс ›</a:t>
+              <a:t/>
             </a:r>
           </a:p>
           <a:p>
@@ -14085,7 +14085,7 @@
                 </a:solidFill>
                 <a:latin typeface="PT Sans"/>
               </a:rPr>
-              <a:t>6-класс ›</a:t>
+              <a:t/>
             </a:r>
           </a:p>
           <a:p>
@@ -14545,7 +14545,7 @@
                 </a:solidFill>
                 <a:latin typeface="PT Sans"/>
               </a:rPr>
-              <a:t>6-класс ›</a:t>
+              <a:t/>
             </a:r>
           </a:p>
           <a:p>
@@ -15023,7 +15023,7 @@
                 </a:solidFill>
                 <a:latin typeface="PT Sans"/>
               </a:rPr>
-              <a:t>6-класс ›</a:t>
+              <a:t/>
             </a:r>
           </a:p>
           <a:p>
@@ -15483,7 +15483,7 @@
                 </a:solidFill>
                 <a:latin typeface="PT Sans"/>
               </a:rPr>
-              <a:t>6-класс ›</a:t>
+              <a:t/>
             </a:r>
           </a:p>
           <a:p>
